--- a/decks/workshop-orchestrator/workshop-orchestrator.pptx
+++ b/decks/workshop-orchestrator/workshop-orchestrator.pptx
@@ -521,7 +521,12 @@
           <a:p>
             <a:r>
               <a:rPr lang="en-US" dirty="0"/>
-              <a:t>Session 4 — final AI Academy session. Requires Claude Code.</a:t>
+              <a:t>Session 4 — final AI Academy session. Uses ChatGPT Org — everyone already has this.
+FACILITATOR PRE-REQ: Before this session, create and publish three Custom GPTs to the workspace:
+• Research Agent — system prompt: 'You are a research analyst. Your only job is to gather and organise information. Always structure output as: Key Finding | Source | Confidence Level. Use web search. Do not draft or synthesise beyond summarising what you find.'
+• Draft Agent — system prompt: 'You are a senior writer. You receive structured research briefs — not raw sources. Turn them into polished proposals. Never go back to source material — work only from what you are given.'
+• Review Agent — system prompt: 'You are a critical editor. You receive drafts and the original brief. Flag gaps, unsupported claims, and anything that does not answer the brief. Use a checklist format: ✓ for what works, ✗ for what needs fixing, with a one-line reason for each.'
+Publish all three to the workspace so they appear in attendees' ChatGPT sidebar before the session starts.</a:t>
             </a:r>
             <a:endParaRPr lang="en-US" dirty="0"/>
           </a:p>
@@ -609,11 +614,12 @@
           <a:p>
             <a:r>
               <a:rPr lang="en-US" dirty="0"/>
-              <a:t>Facilitator runs a 3-phase chain in Claude Code:
-• Agent 1 (Research): reads source materials, produces structured brief
-• Agent 2 (Draft): uses only the brief to write the proposal
-• Agent 3 (Review): checks against requirements, flags gaps
-Narrate each step. ~8 minutes.</a:t>
+              <a:t>Facilitator runs a 3-phase chain live using the pre-built Custom GPTs:
+• Open Research Agent (Custom GPT) → give it the task → show the structured Key Finding | Source | Confidence output
+• Open Draft Agent (Custom GPT) → paste the research brief → show the polished proposal
+• Open Review Agent (Custom GPT) → paste the draft + original brief → show the critique checklist
+Narrate each step: 'Watch — Draft Agent never saw the original documents. It only got the brief. That is filtered context. Each agent stays focused.'
+Show the final output. Compare to what a single ChatGPT conversation would have produced. ~8 minutes.</a:t>
             </a:r>
             <a:endParaRPr lang="en-US" dirty="0"/>
           </a:p>
@@ -701,7 +707,9 @@
           <a:p>
             <a:r>
               <a:rPr lang="en-US" dirty="0"/>
-              <a:t>Give 10-12 minutes. They choose a task (from previous workshops or prescribed). Run Phase 1, save output, start new context for Phase 2 with the output. Compare to single-agent approach.</a:t>
+              <a:t>Give 10-12 minutes. Attendees choose their own task or use the running example. The Custom GPTs are already in their ChatGPT sidebar — no setup needed.
+After both phases: compare the result to giving one plain ChatGPT conversation the whole task at once. Discussion: where did the chain produce better results? Where did the handoff lose something?
+Fallback if time is short: facilitator runs Phase 1 live and attendees all do Phase 2 individually.</a:t>
             </a:r>
             <a:endParaRPr lang="en-US" dirty="0"/>
           </a:p>
@@ -877,7 +885,8 @@
           <a:p>
             <a:r>
               <a:rPr lang="en-US" dirty="0"/>
-              <a:t>Give 4-5 minutes. Re-run the chain. See the difference the skill makes at that station.</a:t>
+              <a:t>Give 4-5 minutes. Facilitator shows where to find the system prompt (click the Custom GPT name in the sidebar → configure). Take 2-3 suggestions from the group and discuss what difference each change would make.
+Key point: that system prompt is the skill. Editing it after this session means every future run of that agent gets better. The agent forgets — but the skill doesn't.</a:t>
             </a:r>
             <a:endParaRPr lang="en-US" dirty="0"/>
           </a:p>
@@ -2928,7 +2937,24 @@
                 <a:ea typeface="Georgia" pitchFamily="34" charset="-122"/>
                 <a:cs typeface="Georgia" pitchFamily="34" charset="-120"/>
               </a:rPr>
-              <a:t>Build a 2-phase chain.</a:t>
+              <a:t>Build a 2-phase chain</a:t>
+            </a:r>
+            <a:endParaRPr lang="en-US" sz="3600" dirty="0"/>
+          </a:p>
+          <a:p>
+            <a:pPr algn="ctr" indent="0" marL="0">
+              <a:buNone/>
+            </a:pPr>
+            <a:r>
+              <a:rPr lang="en-US" sz="3600" b="1" dirty="0">
+                <a:solidFill>
+                  <a:srgbClr val="FFFFFF"/>
+                </a:solidFill>
+                <a:latin typeface="Georgia" pitchFamily="34" charset="0"/>
+                <a:ea typeface="Georgia" pitchFamily="34" charset="-122"/>
+                <a:cs typeface="Georgia" pitchFamily="34" charset="-120"/>
+              </a:rPr>
+              <a:t>using the Custom GPTs.</a:t>
             </a:r>
             <a:endParaRPr lang="en-US" sz="3600" dirty="0"/>
           </a:p>
@@ -2967,7 +2993,7 @@
                 <a:ea typeface="Calibri" pitchFamily="34" charset="-122"/>
                 <a:cs typeface="Calibri" pitchFamily="34" charset="-120"/>
               </a:rPr>
-              <a:t>Phase 1: Research / gather / summarize.</a:t>
+              <a:t>Phase 1: Open Research Agent. Give it your task.</a:t>
             </a:r>
             <a:endParaRPr lang="en-US" sz="2200" dirty="0"/>
           </a:p>
@@ -2984,7 +3010,7 @@
                 <a:ea typeface="Calibri" pitchFamily="34" charset="-122"/>
                 <a:cs typeface="Calibri" pitchFamily="34" charset="-120"/>
               </a:rPr>
-              <a:t>Save the output.</a:t>
+              <a:t>Copy the output.</a:t>
             </a:r>
             <a:endParaRPr lang="en-US" sz="2200" dirty="0"/>
           </a:p>
@@ -3001,7 +3027,7 @@
                 <a:ea typeface="Calibri" pitchFamily="34" charset="-122"/>
                 <a:cs typeface="Calibri" pitchFamily="34" charset="-120"/>
               </a:rPr>
-              <a:t>Phase 2: Feed Phase 1’s output</a:t>
+              <a:t>Phase 2: Open Draft Agent. Paste Phase 1’s output.</a:t>
             </a:r>
             <a:endParaRPr lang="en-US" sz="2200" dirty="0"/>
           </a:p>
@@ -3018,7 +3044,7 @@
                 <a:ea typeface="Calibri" pitchFamily="34" charset="-122"/>
                 <a:cs typeface="Calibri" pitchFamily="34" charset="-120"/>
               </a:rPr>
-              <a:t>to a second agent to draft / create.</a:t>
+              <a:t>Give it the drafting task.</a:t>
             </a:r>
             <a:endParaRPr lang="en-US" sz="2200" dirty="0"/>
           </a:p>
@@ -3299,7 +3325,7 @@
                 <a:ea typeface="Georgia" pitchFamily="34" charset="-122"/>
                 <a:cs typeface="Georgia" pitchFamily="34" charset="-120"/>
               </a:rPr>
-              <a:t>Add a skill to one agent</a:t>
+              <a:t>Look inside the Research Agent.</a:t>
             </a:r>
             <a:endParaRPr lang="en-US" sz="3600" dirty="0"/>
           </a:p>
@@ -3316,7 +3342,7 @@
                 <a:ea typeface="Georgia" pitchFamily="34" charset="-122"/>
                 <a:cs typeface="Georgia" pitchFamily="34" charset="-120"/>
               </a:rPr>
-              <a:t>in your chain.</a:t>
+              <a:t>What would you change?</a:t>
             </a:r>
             <a:endParaRPr lang="en-US" sz="3600" dirty="0"/>
           </a:p>
@@ -3355,7 +3381,7 @@
                 <a:ea typeface="Calibri" pitchFamily="34" charset="-122"/>
                 <a:cs typeface="Calibri" pitchFamily="34" charset="-120"/>
               </a:rPr>
-              <a:t>e.g. "When researching, structure</a:t>
+              <a:t>Click the agent name → View system prompt.</a:t>
             </a:r>
             <a:endParaRPr lang="en-US" sz="2200" dirty="0"/>
           </a:p>
@@ -3372,7 +3398,7 @@
                 <a:ea typeface="Calibri" pitchFamily="34" charset="-122"/>
                 <a:cs typeface="Calibri" pitchFamily="34" charset="-120"/>
               </a:rPr>
-              <a:t>output as: Key Finding, Source,</a:t>
+              <a:t>Based on what you saw in the chain —</a:t>
             </a:r>
             <a:endParaRPr lang="en-US" sz="2200" dirty="0"/>
           </a:p>
@@ -3389,7 +3415,7 @@
                 <a:ea typeface="Calibri" pitchFamily="34" charset="-122"/>
                 <a:cs typeface="Calibri" pitchFamily="34" charset="-120"/>
               </a:rPr>
-              <a:t>Confidence Level."</a:t>
+              <a:t>what would you add, remove, or refine?</a:t>
             </a:r>
             <a:endParaRPr lang="en-US" sz="2200" dirty="0"/>
           </a:p>

--- a/decks/workshop-orchestrator/workshop-orchestrator.pptx
+++ b/decks/workshop-orchestrator/workshop-orchestrator.pptx
@@ -2561,7 +2561,7 @@
     <p:bg>
       <p:bgPr>
         <a:solidFill>
-          <a:srgbClr val="0F0F1A"/>
+          <a:srgbClr val="0A2540"/>
         </a:solidFill>
       </p:bgPr>
     </p:bg>
@@ -2594,7 +2594,7 @@
             <a:avLst/>
           </a:prstGeom>
           <a:solidFill>
-            <a:srgbClr val="00B4D8">
+            <a:srgbClr val="635BFF">
               <a:alpha val="4000"/>
             </a:srgbClr>
           </a:solidFill>
@@ -2667,11 +2667,11 @@
             <a:r>
               <a:rPr lang="en-US" sz="2200" i="1" dirty="0">
                 <a:solidFill>
-                  <a:srgbClr val="94A3B8"/>
-                </a:solidFill>
-                <a:latin typeface="Calibri" pitchFamily="34" charset="0"/>
-                <a:ea typeface="Calibri" pitchFamily="34" charset="-122"/>
-                <a:cs typeface="Calibri" pitchFamily="34" charset="-120"/>
+                  <a:srgbClr val="8B95A5"/>
+                </a:solidFill>
+                <a:latin typeface="Verdana" pitchFamily="34" charset="0"/>
+                <a:ea typeface="Verdana" pitchFamily="34" charset="-122"/>
+                <a:cs typeface="Verdana" pitchFamily="34" charset="-120"/>
               </a:rPr>
               <a:t>Coordinate AI teams</a:t>
             </a:r>
@@ -2693,7 +2693,7 @@
     <p:bg>
       <p:bgPr>
         <a:solidFill>
-          <a:srgbClr val="0F0F1A"/>
+          <a:srgbClr val="0A2540"/>
         </a:solidFill>
       </p:bgPr>
     </p:bg>
@@ -2726,7 +2726,7 @@
             <a:avLst/>
           </a:prstGeom>
           <a:solidFill>
-            <a:srgbClr val="00B4D8">
+            <a:srgbClr val="635BFF">
               <a:alpha val="4000"/>
             </a:srgbClr>
           </a:solidFill>
@@ -2760,7 +2760,7 @@
             <a:r>
               <a:rPr lang="en-US" sz="7200" b="1" dirty="0">
                 <a:solidFill>
-                  <a:srgbClr val="00B4D8"/>
+                  <a:srgbClr val="635BFF"/>
                 </a:solidFill>
                 <a:latin typeface="Georgia" pitchFamily="34" charset="0"/>
                 <a:ea typeface="Georgia" pitchFamily="34" charset="-122"/>
@@ -2799,11 +2799,11 @@
             <a:r>
               <a:rPr lang="en-US" sz="2800" dirty="0">
                 <a:solidFill>
-                  <a:srgbClr val="94A3B8"/>
-                </a:solidFill>
-                <a:latin typeface="Calibri" pitchFamily="34" charset="0"/>
-                <a:ea typeface="Calibri" pitchFamily="34" charset="-122"/>
-                <a:cs typeface="Calibri" pitchFamily="34" charset="-120"/>
+                  <a:srgbClr val="8B95A5"/>
+                </a:solidFill>
+                <a:latin typeface="Verdana" pitchFamily="34" charset="0"/>
+                <a:ea typeface="Verdana" pitchFamily="34" charset="-122"/>
+                <a:cs typeface="Verdana" pitchFamily="34" charset="-120"/>
               </a:rPr>
               <a:t>Watch a 3-phase chain run live.</a:t>
             </a:r>
@@ -2825,7 +2825,7 @@
     <p:bg>
       <p:bgPr>
         <a:solidFill>
-          <a:srgbClr val="0F0F1A"/>
+          <a:srgbClr val="0A2540"/>
         </a:solidFill>
       </p:bgPr>
     </p:bg>
@@ -2858,7 +2858,7 @@
             <a:avLst/>
           </a:prstGeom>
           <a:solidFill>
-            <a:srgbClr val="00B4D8">
+            <a:srgbClr val="635BFF">
               <a:alpha val="4000"/>
             </a:srgbClr>
           </a:solidFill>
@@ -2892,11 +2892,11 @@
             <a:r>
               <a:rPr lang="en-US" sz="2200" b="1" dirty="0">
                 <a:solidFill>
-                  <a:srgbClr val="00B4D8"/>
-                </a:solidFill>
-                <a:latin typeface="Calibri" pitchFamily="34" charset="0"/>
-                <a:ea typeface="Calibri" pitchFamily="34" charset="-122"/>
-                <a:cs typeface="Calibri" pitchFamily="34" charset="-120"/>
+                  <a:srgbClr val="635BFF"/>
+                </a:solidFill>
+                <a:latin typeface="Verdana" pitchFamily="34" charset="0"/>
+                <a:ea typeface="Verdana" pitchFamily="34" charset="-122"/>
+                <a:cs typeface="Verdana" pitchFamily="34" charset="-120"/>
               </a:rPr>
               <a:t>YOUR TURN</a:t>
             </a:r>
@@ -2987,11 +2987,11 @@
             <a:r>
               <a:rPr lang="en-US" sz="2200" dirty="0">
                 <a:solidFill>
-                  <a:srgbClr val="94A3B8"/>
-                </a:solidFill>
-                <a:latin typeface="Calibri" pitchFamily="34" charset="0"/>
-                <a:ea typeface="Calibri" pitchFamily="34" charset="-122"/>
-                <a:cs typeface="Calibri" pitchFamily="34" charset="-120"/>
+                  <a:srgbClr val="8B95A5"/>
+                </a:solidFill>
+                <a:latin typeface="Verdana" pitchFamily="34" charset="0"/>
+                <a:ea typeface="Verdana" pitchFamily="34" charset="-122"/>
+                <a:cs typeface="Verdana" pitchFamily="34" charset="-120"/>
               </a:rPr>
               <a:t>Phase 1: Open Research Agent. Give it your task.</a:t>
             </a:r>
@@ -3004,11 +3004,11 @@
             <a:r>
               <a:rPr lang="en-US" sz="2200" dirty="0">
                 <a:solidFill>
-                  <a:srgbClr val="94A3B8"/>
-                </a:solidFill>
-                <a:latin typeface="Calibri" pitchFamily="34" charset="0"/>
-                <a:ea typeface="Calibri" pitchFamily="34" charset="-122"/>
-                <a:cs typeface="Calibri" pitchFamily="34" charset="-120"/>
+                  <a:srgbClr val="8B95A5"/>
+                </a:solidFill>
+                <a:latin typeface="Verdana" pitchFamily="34" charset="0"/>
+                <a:ea typeface="Verdana" pitchFamily="34" charset="-122"/>
+                <a:cs typeface="Verdana" pitchFamily="34" charset="-120"/>
               </a:rPr>
               <a:t>Copy the output.</a:t>
             </a:r>
@@ -3021,11 +3021,11 @@
             <a:r>
               <a:rPr lang="en-US" sz="2200" dirty="0">
                 <a:solidFill>
-                  <a:srgbClr val="94A3B8"/>
-                </a:solidFill>
-                <a:latin typeface="Calibri" pitchFamily="34" charset="0"/>
-                <a:ea typeface="Calibri" pitchFamily="34" charset="-122"/>
-                <a:cs typeface="Calibri" pitchFamily="34" charset="-120"/>
+                  <a:srgbClr val="8B95A5"/>
+                </a:solidFill>
+                <a:latin typeface="Verdana" pitchFamily="34" charset="0"/>
+                <a:ea typeface="Verdana" pitchFamily="34" charset="-122"/>
+                <a:cs typeface="Verdana" pitchFamily="34" charset="-120"/>
               </a:rPr>
               <a:t>Phase 2: Open Draft Agent. Paste Phase 1’s output.</a:t>
             </a:r>
@@ -3038,11 +3038,11 @@
             <a:r>
               <a:rPr lang="en-US" sz="2200" dirty="0">
                 <a:solidFill>
-                  <a:srgbClr val="94A3B8"/>
-                </a:solidFill>
-                <a:latin typeface="Calibri" pitchFamily="34" charset="0"/>
-                <a:ea typeface="Calibri" pitchFamily="34" charset="-122"/>
-                <a:cs typeface="Calibri" pitchFamily="34" charset="-120"/>
+                  <a:srgbClr val="8B95A5"/>
+                </a:solidFill>
+                <a:latin typeface="Verdana" pitchFamily="34" charset="0"/>
+                <a:ea typeface="Verdana" pitchFamily="34" charset="-122"/>
+                <a:cs typeface="Verdana" pitchFamily="34" charset="-120"/>
               </a:rPr>
               <a:t>Give it the drafting task.</a:t>
             </a:r>
@@ -3064,7 +3064,7 @@
     <p:bg>
       <p:bgPr>
         <a:solidFill>
-          <a:srgbClr val="0F0F1A"/>
+          <a:srgbClr val="0A2540"/>
         </a:solidFill>
       </p:bgPr>
     </p:bg>
@@ -3097,7 +3097,7 @@
             <a:avLst/>
           </a:prstGeom>
           <a:solidFill>
-            <a:srgbClr val="00B4D8">
+            <a:srgbClr val="635BFF">
               <a:alpha val="4000"/>
             </a:srgbClr>
           </a:solidFill>
@@ -3170,11 +3170,11 @@
             <a:r>
               <a:rPr lang="en-US" sz="2800" dirty="0">
                 <a:solidFill>
-                  <a:srgbClr val="94A3B8"/>
-                </a:solidFill>
-                <a:latin typeface="Calibri" pitchFamily="34" charset="0"/>
-                <a:ea typeface="Calibri" pitchFamily="34" charset="-122"/>
-                <a:cs typeface="Calibri" pitchFamily="34" charset="-120"/>
+                  <a:srgbClr val="8B95A5"/>
+                </a:solidFill>
+                <a:latin typeface="Verdana" pitchFamily="34" charset="0"/>
+                <a:ea typeface="Verdana" pitchFamily="34" charset="-122"/>
+                <a:cs typeface="Verdana" pitchFamily="34" charset="-120"/>
               </a:rPr>
               <a:t>You already know these.</a:t>
             </a:r>
@@ -3187,11 +3187,11 @@
             <a:r>
               <a:rPr lang="en-US" sz="2800" dirty="0">
                 <a:solidFill>
-                  <a:srgbClr val="94A3B8"/>
-                </a:solidFill>
-                <a:latin typeface="Calibri" pitchFamily="34" charset="0"/>
-                <a:ea typeface="Calibri" pitchFamily="34" charset="-122"/>
-                <a:cs typeface="Calibri" pitchFamily="34" charset="-120"/>
+                  <a:srgbClr val="8B95A5"/>
+                </a:solidFill>
+                <a:latin typeface="Verdana" pitchFamily="34" charset="0"/>
+                <a:ea typeface="Verdana" pitchFamily="34" charset="-122"/>
+                <a:cs typeface="Verdana" pitchFamily="34" charset="-120"/>
               </a:rPr>
               <a:t>Now each agent gets its own.</a:t>
             </a:r>
@@ -3213,7 +3213,7 @@
     <p:bg>
       <p:bgPr>
         <a:solidFill>
-          <a:srgbClr val="0F0F1A"/>
+          <a:srgbClr val="0A2540"/>
         </a:solidFill>
       </p:bgPr>
     </p:bg>
@@ -3246,7 +3246,7 @@
             <a:avLst/>
           </a:prstGeom>
           <a:solidFill>
-            <a:srgbClr val="00B4D8">
+            <a:srgbClr val="635BFF">
               <a:alpha val="4000"/>
             </a:srgbClr>
           </a:solidFill>
@@ -3280,11 +3280,11 @@
             <a:r>
               <a:rPr lang="en-US" sz="2200" b="1" dirty="0">
                 <a:solidFill>
-                  <a:srgbClr val="00B4D8"/>
-                </a:solidFill>
-                <a:latin typeface="Calibri" pitchFamily="34" charset="0"/>
-                <a:ea typeface="Calibri" pitchFamily="34" charset="-122"/>
-                <a:cs typeface="Calibri" pitchFamily="34" charset="-120"/>
+                  <a:srgbClr val="635BFF"/>
+                </a:solidFill>
+                <a:latin typeface="Verdana" pitchFamily="34" charset="0"/>
+                <a:ea typeface="Verdana" pitchFamily="34" charset="-122"/>
+                <a:cs typeface="Verdana" pitchFamily="34" charset="-120"/>
               </a:rPr>
               <a:t>YOUR TURN</a:t>
             </a:r>
@@ -3375,11 +3375,11 @@
             <a:r>
               <a:rPr lang="en-US" sz="2200" dirty="0">
                 <a:solidFill>
-                  <a:srgbClr val="94A3B8"/>
-                </a:solidFill>
-                <a:latin typeface="Calibri" pitchFamily="34" charset="0"/>
-                <a:ea typeface="Calibri" pitchFamily="34" charset="-122"/>
-                <a:cs typeface="Calibri" pitchFamily="34" charset="-120"/>
+                  <a:srgbClr val="8B95A5"/>
+                </a:solidFill>
+                <a:latin typeface="Verdana" pitchFamily="34" charset="0"/>
+                <a:ea typeface="Verdana" pitchFamily="34" charset="-122"/>
+                <a:cs typeface="Verdana" pitchFamily="34" charset="-120"/>
               </a:rPr>
               <a:t>Click the agent name → View system prompt.</a:t>
             </a:r>
@@ -3392,11 +3392,11 @@
             <a:r>
               <a:rPr lang="en-US" sz="2200" dirty="0">
                 <a:solidFill>
-                  <a:srgbClr val="94A3B8"/>
-                </a:solidFill>
-                <a:latin typeface="Calibri" pitchFamily="34" charset="0"/>
-                <a:ea typeface="Calibri" pitchFamily="34" charset="-122"/>
-                <a:cs typeface="Calibri" pitchFamily="34" charset="-120"/>
+                  <a:srgbClr val="8B95A5"/>
+                </a:solidFill>
+                <a:latin typeface="Verdana" pitchFamily="34" charset="0"/>
+                <a:ea typeface="Verdana" pitchFamily="34" charset="-122"/>
+                <a:cs typeface="Verdana" pitchFamily="34" charset="-120"/>
               </a:rPr>
               <a:t>Based on what you saw in the chain —</a:t>
             </a:r>
@@ -3409,11 +3409,11 @@
             <a:r>
               <a:rPr lang="en-US" sz="2200" dirty="0">
                 <a:solidFill>
-                  <a:srgbClr val="94A3B8"/>
-                </a:solidFill>
-                <a:latin typeface="Calibri" pitchFamily="34" charset="0"/>
-                <a:ea typeface="Calibri" pitchFamily="34" charset="-122"/>
-                <a:cs typeface="Calibri" pitchFamily="34" charset="-120"/>
+                  <a:srgbClr val="8B95A5"/>
+                </a:solidFill>
+                <a:latin typeface="Verdana" pitchFamily="34" charset="0"/>
+                <a:ea typeface="Verdana" pitchFamily="34" charset="-122"/>
+                <a:cs typeface="Verdana" pitchFamily="34" charset="-120"/>
               </a:rPr>
               <a:t>what would you add, remove, or refine?</a:t>
             </a:r>
@@ -3435,7 +3435,7 @@
     <p:bg>
       <p:bgPr>
         <a:solidFill>
-          <a:srgbClr val="0F0F1A"/>
+          <a:srgbClr val="0A2540"/>
         </a:solidFill>
       </p:bgPr>
     </p:bg>
@@ -3468,7 +3468,7 @@
             <a:avLst/>
           </a:prstGeom>
           <a:solidFill>
-            <a:srgbClr val="00B4D8">
+            <a:srgbClr val="635BFF">
               <a:alpha val="4000"/>
             </a:srgbClr>
           </a:solidFill>
@@ -3562,7 +3562,7 @@
     <p:bg>
       <p:bgPr>
         <a:solidFill>
-          <a:srgbClr val="0F0F1A"/>
+          <a:srgbClr val="0A2540"/>
         </a:solidFill>
       </p:bgPr>
     </p:bg>
@@ -3595,7 +3595,7 @@
             <a:avLst/>
           </a:prstGeom>
           <a:solidFill>
-            <a:srgbClr val="00B4D8">
+            <a:srgbClr val="635BFF">
               <a:alpha val="4000"/>
             </a:srgbClr>
           </a:solidFill>
@@ -3629,7 +3629,7 @@
             <a:r>
               <a:rPr lang="en-US" sz="12000" b="1" dirty="0">
                 <a:solidFill>
-                  <a:srgbClr val="E63946"/>
+                  <a:srgbClr val="FF6B8A"/>
                 </a:solidFill>
                 <a:latin typeface="Georgia" pitchFamily="34" charset="0"/>
                 <a:ea typeface="Georgia" pitchFamily="34" charset="-122"/>
@@ -3668,11 +3668,11 @@
             <a:r>
               <a:rPr lang="en-US" sz="2800" dirty="0">
                 <a:solidFill>
-                  <a:srgbClr val="94A3B8"/>
-                </a:solidFill>
-                <a:latin typeface="Calibri" pitchFamily="34" charset="0"/>
-                <a:ea typeface="Calibri" pitchFamily="34" charset="-122"/>
-                <a:cs typeface="Calibri" pitchFamily="34" charset="-120"/>
+                  <a:srgbClr val="8B95A5"/>
+                </a:solidFill>
+                <a:latin typeface="Verdana" pitchFamily="34" charset="0"/>
+                <a:ea typeface="Verdana" pitchFamily="34" charset="-122"/>
+                <a:cs typeface="Verdana" pitchFamily="34" charset="-120"/>
               </a:rPr>
               <a:t>of you being the bottleneck</a:t>
             </a:r>
@@ -3707,11 +3707,11 @@
             <a:r>
               <a:rPr lang="en-US" sz="1100" dirty="0">
                 <a:solidFill>
-                  <a:srgbClr val="94A3B8"/>
-                </a:solidFill>
-                <a:latin typeface="Calibri" pitchFamily="34" charset="0"/>
-                <a:ea typeface="Calibri" pitchFamily="34" charset="-122"/>
-                <a:cs typeface="Calibri" pitchFamily="34" charset="-120"/>
+                  <a:srgbClr val="8B95A5"/>
+                </a:solidFill>
+                <a:latin typeface="Verdana" pitchFamily="34" charset="0"/>
+                <a:ea typeface="Verdana" pitchFamily="34" charset="-122"/>
+                <a:cs typeface="Verdana" pitchFamily="34" charset="-120"/>
               </a:rPr>
               <a:t>Illustrative estimate</a:t>
             </a:r>
@@ -3733,7 +3733,7 @@
     <p:bg>
       <p:bgPr>
         <a:solidFill>
-          <a:srgbClr val="0F0F1A"/>
+          <a:srgbClr val="0A2540"/>
         </a:solidFill>
       </p:bgPr>
     </p:bg>
@@ -3766,7 +3766,7 @@
             <a:avLst/>
           </a:prstGeom>
           <a:solidFill>
-            <a:srgbClr val="00B4D8">
+            <a:srgbClr val="635BFF">
               <a:alpha val="4000"/>
             </a:srgbClr>
           </a:solidFill>
@@ -3800,7 +3800,7 @@
             <a:r>
               <a:rPr lang="en-US" sz="12000" b="1" dirty="0">
                 <a:solidFill>
-                  <a:srgbClr val="2D936C"/>
+                  <a:srgbClr val="09825D"/>
                 </a:solidFill>
                 <a:latin typeface="Georgia" pitchFamily="34" charset="0"/>
                 <a:ea typeface="Georgia" pitchFamily="34" charset="-122"/>
@@ -3839,11 +3839,11 @@
             <a:r>
               <a:rPr lang="en-US" sz="2800" dirty="0">
                 <a:solidFill>
-                  <a:srgbClr val="94A3B8"/>
-                </a:solidFill>
-                <a:latin typeface="Calibri" pitchFamily="34" charset="0"/>
-                <a:ea typeface="Calibri" pitchFamily="34" charset="-122"/>
-                <a:cs typeface="Calibri" pitchFamily="34" charset="-120"/>
+                  <a:srgbClr val="8B95A5"/>
+                </a:solidFill>
+                <a:latin typeface="Verdana" pitchFamily="34" charset="0"/>
+                <a:ea typeface="Verdana" pitchFamily="34" charset="-122"/>
+                <a:cs typeface="Verdana" pitchFamily="34" charset="-120"/>
               </a:rPr>
               <a:t>of judgment — the part only humans can do</a:t>
             </a:r>
@@ -3865,7 +3865,7 @@
     <p:bg>
       <p:bgPr>
         <a:solidFill>
-          <a:srgbClr val="0F0F1A"/>
+          <a:srgbClr val="0A2540"/>
         </a:solidFill>
       </p:bgPr>
     </p:bg>
@@ -3898,7 +3898,7 @@
             <a:avLst/>
           </a:prstGeom>
           <a:solidFill>
-            <a:srgbClr val="00B4D8">
+            <a:srgbClr val="635BFF">
               <a:alpha val="4000"/>
             </a:srgbClr>
           </a:solidFill>
@@ -4005,11 +4005,11 @@
             <a:r>
               <a:rPr lang="en-US" sz="2800" dirty="0">
                 <a:solidFill>
-                  <a:srgbClr val="94A3B8"/>
-                </a:solidFill>
-                <a:latin typeface="Calibri" pitchFamily="34" charset="0"/>
-                <a:ea typeface="Calibri" pitchFamily="34" charset="-122"/>
-                <a:cs typeface="Calibri" pitchFamily="34" charset="-120"/>
+                  <a:srgbClr val="8B95A5"/>
+                </a:solidFill>
+                <a:latin typeface="Verdana" pitchFamily="34" charset="0"/>
+                <a:ea typeface="Verdana" pitchFamily="34" charset="-122"/>
+                <a:cs typeface="Verdana" pitchFamily="34" charset="-120"/>
               </a:rPr>
               <a:t>Your feedback becomes skills.</a:t>
             </a:r>
@@ -4022,11 +4022,11 @@
             <a:r>
               <a:rPr lang="en-US" sz="2800" dirty="0">
                 <a:solidFill>
-                  <a:srgbClr val="94A3B8"/>
-                </a:solidFill>
-                <a:latin typeface="Calibri" pitchFamily="34" charset="0"/>
-                <a:ea typeface="Calibri" pitchFamily="34" charset="-122"/>
-                <a:cs typeface="Calibri" pitchFamily="34" charset="-120"/>
+                  <a:srgbClr val="8B95A5"/>
+                </a:solidFill>
+                <a:latin typeface="Verdana" pitchFamily="34" charset="0"/>
+                <a:ea typeface="Verdana" pitchFamily="34" charset="-122"/>
+                <a:cs typeface="Verdana" pitchFamily="34" charset="-120"/>
               </a:rPr>
               <a:t>She won’t remember, but the skills will.</a:t>
             </a:r>
@@ -4048,7 +4048,7 @@
     <p:bg>
       <p:bgPr>
         <a:solidFill>
-          <a:srgbClr val="0F0F1A"/>
+          <a:srgbClr val="0A2540"/>
         </a:solidFill>
       </p:bgPr>
     </p:bg>
@@ -4081,7 +4081,7 @@
             <a:avLst/>
           </a:prstGeom>
           <a:solidFill>
-            <a:srgbClr val="00B4D8">
+            <a:srgbClr val="635BFF">
               <a:alpha val="4000"/>
             </a:srgbClr>
           </a:solidFill>
@@ -4141,7 +4141,7 @@
     <p:bg>
       <p:bgPr>
         <a:solidFill>
-          <a:srgbClr val="0F0F1A"/>
+          <a:srgbClr val="0A2540"/>
         </a:solidFill>
       </p:bgPr>
     </p:bg>
@@ -4174,7 +4174,7 @@
             <a:avLst/>
           </a:prstGeom>
           <a:solidFill>
-            <a:srgbClr val="00B4D8">
+            <a:srgbClr val="635BFF">
               <a:alpha val="4000"/>
             </a:srgbClr>
           </a:solidFill>
@@ -4198,13 +4198,13 @@
             </a:avLst>
           </a:prstGeom>
           <a:solidFill>
-            <a:srgbClr val="0F0F1A">
+            <a:srgbClr val="0A2540">
               <a:alpha val="50000"/>
             </a:srgbClr>
           </a:solidFill>
           <a:ln w="12700">
             <a:solidFill>
-              <a:srgbClr val="94A3B8"/>
+              <a:srgbClr val="8B95A5"/>
             </a:solidFill>
             <a:prstDash val="solid"/>
           </a:ln>
@@ -4235,17 +4235,17 @@
               <a:buNone/>
             </a:pPr>
             <a:r>
-              <a:rPr lang="en-US" sz="1500" b="1" dirty="0">
-                <a:solidFill>
-                  <a:srgbClr val="94A3B8"/>
-                </a:solidFill>
-                <a:latin typeface="Calibri" pitchFamily="34" charset="0"/>
-                <a:ea typeface="Calibri" pitchFamily="34" charset="-122"/>
-                <a:cs typeface="Calibri" pitchFamily="34" charset="-120"/>
+              <a:rPr lang="en-US" sz="1200" b="1" dirty="0">
+                <a:solidFill>
+                  <a:srgbClr val="8B95A5"/>
+                </a:solidFill>
+                <a:latin typeface="Verdana" pitchFamily="34" charset="0"/>
+                <a:ea typeface="Verdana" pitchFamily="34" charset="-122"/>
+                <a:cs typeface="Verdana" pitchFamily="34" charset="-120"/>
               </a:rPr>
               <a:t>Skeptic</a:t>
             </a:r>
-            <a:endParaRPr lang="en-US" sz="1500" dirty="0"/>
+            <a:endParaRPr lang="en-US" sz="1200" dirty="0"/>
           </a:p>
         </p:txBody>
       </p:sp>
@@ -4274,17 +4274,17 @@
               <a:buNone/>
             </a:pPr>
             <a:r>
-              <a:rPr lang="en-US" sz="1400" dirty="0">
-                <a:solidFill>
-                  <a:srgbClr val="94A3B8"/>
-                </a:solidFill>
-                <a:latin typeface="Calibri" pitchFamily="34" charset="0"/>
-                <a:ea typeface="Calibri" pitchFamily="34" charset="-122"/>
-                <a:cs typeface="Calibri" pitchFamily="34" charset="-120"/>
+              <a:rPr lang="en-US" sz="1100" dirty="0">
+                <a:solidFill>
+                  <a:srgbClr val="8B95A5"/>
+                </a:solidFill>
+                <a:latin typeface="Verdana" pitchFamily="34" charset="0"/>
+                <a:ea typeface="Verdana" pitchFamily="34" charset="-122"/>
+                <a:cs typeface="Verdana" pitchFamily="34" charset="-120"/>
               </a:rPr>
               <a:t>→</a:t>
             </a:r>
-            <a:endParaRPr lang="en-US" sz="1400" dirty="0"/>
+            <a:endParaRPr lang="en-US" sz="1100" dirty="0"/>
           </a:p>
         </p:txBody>
       </p:sp>
@@ -4305,13 +4305,13 @@
             </a:avLst>
           </a:prstGeom>
           <a:solidFill>
-            <a:srgbClr val="00B4D8">
+            <a:srgbClr val="635BFF">
               <a:alpha val="80000"/>
             </a:srgbClr>
           </a:solidFill>
           <a:ln w="25400">
             <a:solidFill>
-              <a:srgbClr val="00B4D8"/>
+              <a:srgbClr val="635BFF"/>
             </a:solidFill>
             <a:prstDash val="solid"/>
           </a:ln>
@@ -4342,17 +4342,17 @@
               <a:buNone/>
             </a:pPr>
             <a:r>
-              <a:rPr lang="en-US" sz="1500" b="1" dirty="0">
+              <a:rPr lang="en-US" sz="1200" b="1" dirty="0">
                 <a:solidFill>
                   <a:srgbClr val="FFFFFF"/>
                 </a:solidFill>
-                <a:latin typeface="Calibri" pitchFamily="34" charset="0"/>
-                <a:ea typeface="Calibri" pitchFamily="34" charset="-122"/>
-                <a:cs typeface="Calibri" pitchFamily="34" charset="-120"/>
+                <a:latin typeface="Verdana" pitchFamily="34" charset="0"/>
+                <a:ea typeface="Verdana" pitchFamily="34" charset="-122"/>
+                <a:cs typeface="Verdana" pitchFamily="34" charset="-120"/>
               </a:rPr>
               <a:t>Explorer</a:t>
             </a:r>
-            <a:endParaRPr lang="en-US" sz="1500" dirty="0"/>
+            <a:endParaRPr lang="en-US" sz="1200" dirty="0"/>
           </a:p>
         </p:txBody>
       </p:sp>
@@ -4381,17 +4381,17 @@
               <a:buNone/>
             </a:pPr>
             <a:r>
-              <a:rPr lang="en-US" sz="1400" dirty="0">
-                <a:solidFill>
-                  <a:srgbClr val="94A3B8"/>
-                </a:solidFill>
-                <a:latin typeface="Calibri" pitchFamily="34" charset="0"/>
-                <a:ea typeface="Calibri" pitchFamily="34" charset="-122"/>
-                <a:cs typeface="Calibri" pitchFamily="34" charset="-120"/>
+              <a:rPr lang="en-US" sz="1100" dirty="0">
+                <a:solidFill>
+                  <a:srgbClr val="8B95A5"/>
+                </a:solidFill>
+                <a:latin typeface="Verdana" pitchFamily="34" charset="0"/>
+                <a:ea typeface="Verdana" pitchFamily="34" charset="-122"/>
+                <a:cs typeface="Verdana" pitchFamily="34" charset="-120"/>
               </a:rPr>
               <a:t>→</a:t>
             </a:r>
-            <a:endParaRPr lang="en-US" sz="1400" dirty="0"/>
+            <a:endParaRPr lang="en-US" sz="1100" dirty="0"/>
           </a:p>
         </p:txBody>
       </p:sp>
@@ -4412,13 +4412,13 @@
             </a:avLst>
           </a:prstGeom>
           <a:solidFill>
-            <a:srgbClr val="00B4D8">
+            <a:srgbClr val="635BFF">
               <a:alpha val="80000"/>
             </a:srgbClr>
           </a:solidFill>
           <a:ln w="25400">
             <a:solidFill>
-              <a:srgbClr val="00B4D8"/>
+              <a:srgbClr val="635BFF"/>
             </a:solidFill>
             <a:prstDash val="solid"/>
           </a:ln>
@@ -4449,17 +4449,17 @@
               <a:buNone/>
             </a:pPr>
             <a:r>
-              <a:rPr lang="en-US" sz="1500" b="1" dirty="0">
+              <a:rPr lang="en-US" sz="1200" b="1" dirty="0">
                 <a:solidFill>
                   <a:srgbClr val="FFFFFF"/>
                 </a:solidFill>
-                <a:latin typeface="Calibri" pitchFamily="34" charset="0"/>
-                <a:ea typeface="Calibri" pitchFamily="34" charset="-122"/>
-                <a:cs typeface="Calibri" pitchFamily="34" charset="-120"/>
+                <a:latin typeface="Verdana" pitchFamily="34" charset="0"/>
+                <a:ea typeface="Verdana" pitchFamily="34" charset="-122"/>
+                <a:cs typeface="Verdana" pitchFamily="34" charset="-120"/>
               </a:rPr>
               <a:t>Whisperer</a:t>
             </a:r>
-            <a:endParaRPr lang="en-US" sz="1500" dirty="0"/>
+            <a:endParaRPr lang="en-US" sz="1200" dirty="0"/>
           </a:p>
         </p:txBody>
       </p:sp>
@@ -4488,17 +4488,17 @@
               <a:buNone/>
             </a:pPr>
             <a:r>
-              <a:rPr lang="en-US" sz="1400" dirty="0">
-                <a:solidFill>
-                  <a:srgbClr val="94A3B8"/>
-                </a:solidFill>
-                <a:latin typeface="Calibri" pitchFamily="34" charset="0"/>
-                <a:ea typeface="Calibri" pitchFamily="34" charset="-122"/>
-                <a:cs typeface="Calibri" pitchFamily="34" charset="-120"/>
+              <a:rPr lang="en-US" sz="1100" dirty="0">
+                <a:solidFill>
+                  <a:srgbClr val="8B95A5"/>
+                </a:solidFill>
+                <a:latin typeface="Verdana" pitchFamily="34" charset="0"/>
+                <a:ea typeface="Verdana" pitchFamily="34" charset="-122"/>
+                <a:cs typeface="Verdana" pitchFamily="34" charset="-120"/>
               </a:rPr>
               <a:t>→</a:t>
             </a:r>
-            <a:endParaRPr lang="en-US" sz="1400" dirty="0"/>
+            <a:endParaRPr lang="en-US" sz="1100" dirty="0"/>
           </a:p>
         </p:txBody>
       </p:sp>
@@ -4519,13 +4519,13 @@
             </a:avLst>
           </a:prstGeom>
           <a:solidFill>
-            <a:srgbClr val="00B4D8">
+            <a:srgbClr val="635BFF">
               <a:alpha val="80000"/>
             </a:srgbClr>
           </a:solidFill>
           <a:ln w="25400">
             <a:solidFill>
-              <a:srgbClr val="00B4D8"/>
+              <a:srgbClr val="635BFF"/>
             </a:solidFill>
             <a:prstDash val="solid"/>
           </a:ln>
@@ -4556,17 +4556,17 @@
               <a:buNone/>
             </a:pPr>
             <a:r>
-              <a:rPr lang="en-US" sz="1500" b="1" dirty="0">
+              <a:rPr lang="en-US" sz="1200" b="1" dirty="0">
                 <a:solidFill>
                   <a:srgbClr val="FFFFFF"/>
                 </a:solidFill>
-                <a:latin typeface="Calibri" pitchFamily="34" charset="0"/>
-                <a:ea typeface="Calibri" pitchFamily="34" charset="-122"/>
-                <a:cs typeface="Calibri" pitchFamily="34" charset="-120"/>
+                <a:latin typeface="Verdana" pitchFamily="34" charset="0"/>
+                <a:ea typeface="Verdana" pitchFamily="34" charset="-122"/>
+                <a:cs typeface="Verdana" pitchFamily="34" charset="-120"/>
               </a:rPr>
               <a:t>Strategist</a:t>
             </a:r>
-            <a:endParaRPr lang="en-US" sz="1500" dirty="0"/>
+            <a:endParaRPr lang="en-US" sz="1200" dirty="0"/>
           </a:p>
         </p:txBody>
       </p:sp>
@@ -4595,17 +4595,17 @@
               <a:buNone/>
             </a:pPr>
             <a:r>
-              <a:rPr lang="en-US" sz="1400" dirty="0">
-                <a:solidFill>
-                  <a:srgbClr val="94A3B8"/>
-                </a:solidFill>
-                <a:latin typeface="Calibri" pitchFamily="34" charset="0"/>
-                <a:ea typeface="Calibri" pitchFamily="34" charset="-122"/>
-                <a:cs typeface="Calibri" pitchFamily="34" charset="-120"/>
+              <a:rPr lang="en-US" sz="1100" dirty="0">
+                <a:solidFill>
+                  <a:srgbClr val="8B95A5"/>
+                </a:solidFill>
+                <a:latin typeface="Verdana" pitchFamily="34" charset="0"/>
+                <a:ea typeface="Verdana" pitchFamily="34" charset="-122"/>
+                <a:cs typeface="Verdana" pitchFamily="34" charset="-120"/>
               </a:rPr>
               <a:t>→</a:t>
             </a:r>
-            <a:endParaRPr lang="en-US" sz="1400" dirty="0"/>
+            <a:endParaRPr lang="en-US" sz="1100" dirty="0"/>
           </a:p>
         </p:txBody>
       </p:sp>
@@ -4626,13 +4626,13 @@
             </a:avLst>
           </a:prstGeom>
           <a:solidFill>
-            <a:srgbClr val="00B4D8">
+            <a:srgbClr val="635BFF">
               <a:alpha val="80000"/>
             </a:srgbClr>
           </a:solidFill>
           <a:ln w="25400">
             <a:solidFill>
-              <a:srgbClr val="00B4D8"/>
+              <a:srgbClr val="635BFF"/>
             </a:solidFill>
             <a:prstDash val="solid"/>
           </a:ln>
@@ -4663,17 +4663,17 @@
               <a:buNone/>
             </a:pPr>
             <a:r>
-              <a:rPr lang="en-US" sz="1500" b="1" dirty="0">
+              <a:rPr lang="en-US" sz="1200" b="1" dirty="0">
                 <a:solidFill>
                   <a:srgbClr val="FFFFFF"/>
                 </a:solidFill>
-                <a:latin typeface="Calibri" pitchFamily="34" charset="0"/>
-                <a:ea typeface="Calibri" pitchFamily="34" charset="-122"/>
-                <a:cs typeface="Calibri" pitchFamily="34" charset="-120"/>
+                <a:latin typeface="Verdana" pitchFamily="34" charset="0"/>
+                <a:ea typeface="Verdana" pitchFamily="34" charset="-122"/>
+                <a:cs typeface="Verdana" pitchFamily="34" charset="-120"/>
               </a:rPr>
               <a:t>Operator</a:t>
             </a:r>
-            <a:endParaRPr lang="en-US" sz="1500" dirty="0"/>
+            <a:endParaRPr lang="en-US" sz="1200" dirty="0"/>
           </a:p>
         </p:txBody>
       </p:sp>
@@ -4702,17 +4702,17 @@
               <a:buNone/>
             </a:pPr>
             <a:r>
-              <a:rPr lang="en-US" sz="1400" dirty="0">
-                <a:solidFill>
-                  <a:srgbClr val="94A3B8"/>
-                </a:solidFill>
-                <a:latin typeface="Calibri" pitchFamily="34" charset="0"/>
-                <a:ea typeface="Calibri" pitchFamily="34" charset="-122"/>
-                <a:cs typeface="Calibri" pitchFamily="34" charset="-120"/>
+              <a:rPr lang="en-US" sz="1100" dirty="0">
+                <a:solidFill>
+                  <a:srgbClr val="8B95A5"/>
+                </a:solidFill>
+                <a:latin typeface="Verdana" pitchFamily="34" charset="0"/>
+                <a:ea typeface="Verdana" pitchFamily="34" charset="-122"/>
+                <a:cs typeface="Verdana" pitchFamily="34" charset="-120"/>
               </a:rPr>
               <a:t>→</a:t>
             </a:r>
-            <a:endParaRPr lang="en-US" sz="1400" dirty="0"/>
+            <a:endParaRPr lang="en-US" sz="1100" dirty="0"/>
           </a:p>
         </p:txBody>
       </p:sp>
@@ -4733,13 +4733,13 @@
             </a:avLst>
           </a:prstGeom>
           <a:solidFill>
-            <a:srgbClr val="00B4D8">
+            <a:srgbClr val="635BFF">
               <a:alpha val="80000"/>
             </a:srgbClr>
           </a:solidFill>
           <a:ln w="25400">
             <a:solidFill>
-              <a:srgbClr val="00B4D8"/>
+              <a:srgbClr val="635BFF"/>
             </a:solidFill>
             <a:prstDash val="solid"/>
           </a:ln>
@@ -4770,17 +4770,17 @@
               <a:buNone/>
             </a:pPr>
             <a:r>
-              <a:rPr lang="en-US" sz="1500" b="1" dirty="0">
+              <a:rPr lang="en-US" sz="1200" b="1" dirty="0">
                 <a:solidFill>
                   <a:srgbClr val="FFFFFF"/>
                 </a:solidFill>
-                <a:latin typeface="Calibri" pitchFamily="34" charset="0"/>
-                <a:ea typeface="Calibri" pitchFamily="34" charset="-122"/>
-                <a:cs typeface="Calibri" pitchFamily="34" charset="-120"/>
+                <a:latin typeface="Verdana" pitchFamily="34" charset="0"/>
+                <a:ea typeface="Verdana" pitchFamily="34" charset="-122"/>
+                <a:cs typeface="Verdana" pitchFamily="34" charset="-120"/>
               </a:rPr>
               <a:t>Orchestrator</a:t>
             </a:r>
-            <a:endParaRPr lang="en-US" sz="1500" dirty="0"/>
+            <a:endParaRPr lang="en-US" sz="1200" dirty="0"/>
           </a:p>
         </p:txBody>
       </p:sp>
@@ -4809,17 +4809,17 @@
               <a:buNone/>
             </a:pPr>
             <a:r>
-              <a:rPr lang="en-US" sz="1400" dirty="0">
-                <a:solidFill>
-                  <a:srgbClr val="94A3B8"/>
-                </a:solidFill>
-                <a:latin typeface="Calibri" pitchFamily="34" charset="0"/>
-                <a:ea typeface="Calibri" pitchFamily="34" charset="-122"/>
-                <a:cs typeface="Calibri" pitchFamily="34" charset="-120"/>
+              <a:rPr lang="en-US" sz="1100" dirty="0">
+                <a:solidFill>
+                  <a:srgbClr val="8B95A5"/>
+                </a:solidFill>
+                <a:latin typeface="Verdana" pitchFamily="34" charset="0"/>
+                <a:ea typeface="Verdana" pitchFamily="34" charset="-122"/>
+                <a:cs typeface="Verdana" pitchFamily="34" charset="-120"/>
               </a:rPr>
               <a:t>→</a:t>
             </a:r>
-            <a:endParaRPr lang="en-US" sz="1400" dirty="0"/>
+            <a:endParaRPr lang="en-US" sz="1100" dirty="0"/>
           </a:p>
         </p:txBody>
       </p:sp>
@@ -4840,13 +4840,13 @@
             </a:avLst>
           </a:prstGeom>
           <a:solidFill>
-            <a:srgbClr val="0F0F1A">
+            <a:srgbClr val="0A2540">
               <a:alpha val="50000"/>
             </a:srgbClr>
           </a:solidFill>
           <a:ln w="12700">
             <a:solidFill>
-              <a:srgbClr val="94A3B8"/>
+              <a:srgbClr val="8B95A5"/>
             </a:solidFill>
             <a:prstDash val="dash"/>
           </a:ln>
@@ -4877,17 +4877,17 @@
               <a:buNone/>
             </a:pPr>
             <a:r>
-              <a:rPr lang="en-US" sz="1500" b="1" dirty="0">
-                <a:solidFill>
-                  <a:srgbClr val="94A3B8"/>
-                </a:solidFill>
-                <a:latin typeface="Calibri" pitchFamily="34" charset="0"/>
-                <a:ea typeface="Calibri" pitchFamily="34" charset="-122"/>
-                <a:cs typeface="Calibri" pitchFamily="34" charset="-120"/>
+              <a:rPr lang="en-US" sz="1200" b="1" dirty="0">
+                <a:solidFill>
+                  <a:srgbClr val="8B95A5"/>
+                </a:solidFill>
+                <a:latin typeface="Verdana" pitchFamily="34" charset="0"/>
+                <a:ea typeface="Verdana" pitchFamily="34" charset="-122"/>
+                <a:cs typeface="Verdana" pitchFamily="34" charset="-120"/>
               </a:rPr>
               <a:t>Builder</a:t>
             </a:r>
-            <a:endParaRPr lang="en-US" sz="1500" dirty="0"/>
+            <a:endParaRPr lang="en-US" sz="1200" dirty="0"/>
           </a:p>
         </p:txBody>
       </p:sp>
@@ -4918,7 +4918,7 @@
             <a:r>
               <a:rPr lang="en-US" sz="3200" b="1" dirty="0">
                 <a:solidFill>
-                  <a:srgbClr val="00B4D8"/>
+                  <a:srgbClr val="635BFF"/>
                 </a:solidFill>
                 <a:latin typeface="Georgia" pitchFamily="34" charset="0"/>
                 <a:ea typeface="Georgia" pitchFamily="34" charset="-122"/>
@@ -4944,7 +4944,7 @@
     <p:bg>
       <p:bgPr>
         <a:solidFill>
-          <a:srgbClr val="0F0F1A"/>
+          <a:srgbClr val="0A2540"/>
         </a:solidFill>
       </p:bgPr>
     </p:bg>
@@ -4977,7 +4977,7 @@
             <a:avLst/>
           </a:prstGeom>
           <a:solidFill>
-            <a:srgbClr val="00B4D8">
+            <a:srgbClr val="635BFF">
               <a:alpha val="4000"/>
             </a:srgbClr>
           </a:solidFill>
@@ -5001,13 +5001,13 @@
             </a:avLst>
           </a:prstGeom>
           <a:solidFill>
-            <a:srgbClr val="0F0F1A">
+            <a:srgbClr val="0A2540">
               <a:alpha val="50000"/>
             </a:srgbClr>
           </a:solidFill>
           <a:ln w="12700">
             <a:solidFill>
-              <a:srgbClr val="94A3B8"/>
+              <a:srgbClr val="8B95A5"/>
             </a:solidFill>
             <a:prstDash val="solid"/>
           </a:ln>
@@ -5038,17 +5038,17 @@
               <a:buNone/>
             </a:pPr>
             <a:r>
-              <a:rPr lang="en-US" sz="1500" b="1" dirty="0">
-                <a:solidFill>
-                  <a:srgbClr val="94A3B8"/>
-                </a:solidFill>
-                <a:latin typeface="Calibri" pitchFamily="34" charset="0"/>
-                <a:ea typeface="Calibri" pitchFamily="34" charset="-122"/>
-                <a:cs typeface="Calibri" pitchFamily="34" charset="-120"/>
+              <a:rPr lang="en-US" sz="1200" b="1" dirty="0">
+                <a:solidFill>
+                  <a:srgbClr val="8B95A5"/>
+                </a:solidFill>
+                <a:latin typeface="Verdana" pitchFamily="34" charset="0"/>
+                <a:ea typeface="Verdana" pitchFamily="34" charset="-122"/>
+                <a:cs typeface="Verdana" pitchFamily="34" charset="-120"/>
               </a:rPr>
               <a:t>Skeptic</a:t>
             </a:r>
-            <a:endParaRPr lang="en-US" sz="1500" dirty="0"/>
+            <a:endParaRPr lang="en-US" sz="1200" dirty="0"/>
           </a:p>
         </p:txBody>
       </p:sp>
@@ -5077,17 +5077,17 @@
               <a:buNone/>
             </a:pPr>
             <a:r>
-              <a:rPr lang="en-US" sz="1400" dirty="0">
-                <a:solidFill>
-                  <a:srgbClr val="94A3B8"/>
-                </a:solidFill>
-                <a:latin typeface="Calibri" pitchFamily="34" charset="0"/>
-                <a:ea typeface="Calibri" pitchFamily="34" charset="-122"/>
-                <a:cs typeface="Calibri" pitchFamily="34" charset="-120"/>
+              <a:rPr lang="en-US" sz="1100" dirty="0">
+                <a:solidFill>
+                  <a:srgbClr val="8B95A5"/>
+                </a:solidFill>
+                <a:latin typeface="Verdana" pitchFamily="34" charset="0"/>
+                <a:ea typeface="Verdana" pitchFamily="34" charset="-122"/>
+                <a:cs typeface="Verdana" pitchFamily="34" charset="-120"/>
               </a:rPr>
               <a:t>→</a:t>
             </a:r>
-            <a:endParaRPr lang="en-US" sz="1400" dirty="0"/>
+            <a:endParaRPr lang="en-US" sz="1100" dirty="0"/>
           </a:p>
         </p:txBody>
       </p:sp>
@@ -5108,13 +5108,13 @@
             </a:avLst>
           </a:prstGeom>
           <a:solidFill>
-            <a:srgbClr val="0F0F1A">
+            <a:srgbClr val="0A2540">
               <a:alpha val="50000"/>
             </a:srgbClr>
           </a:solidFill>
           <a:ln w="12700">
             <a:solidFill>
-              <a:srgbClr val="94A3B8"/>
+              <a:srgbClr val="8B95A5"/>
             </a:solidFill>
             <a:prstDash val="solid"/>
           </a:ln>
@@ -5145,17 +5145,17 @@
               <a:buNone/>
             </a:pPr>
             <a:r>
-              <a:rPr lang="en-US" sz="1500" b="1" dirty="0">
-                <a:solidFill>
-                  <a:srgbClr val="94A3B8"/>
-                </a:solidFill>
-                <a:latin typeface="Calibri" pitchFamily="34" charset="0"/>
-                <a:ea typeface="Calibri" pitchFamily="34" charset="-122"/>
-                <a:cs typeface="Calibri" pitchFamily="34" charset="-120"/>
+              <a:rPr lang="en-US" sz="1200" b="1" dirty="0">
+                <a:solidFill>
+                  <a:srgbClr val="8B95A5"/>
+                </a:solidFill>
+                <a:latin typeface="Verdana" pitchFamily="34" charset="0"/>
+                <a:ea typeface="Verdana" pitchFamily="34" charset="-122"/>
+                <a:cs typeface="Verdana" pitchFamily="34" charset="-120"/>
               </a:rPr>
               <a:t>Explorer</a:t>
             </a:r>
-            <a:endParaRPr lang="en-US" sz="1500" dirty="0"/>
+            <a:endParaRPr lang="en-US" sz="1200" dirty="0"/>
           </a:p>
         </p:txBody>
       </p:sp>
@@ -5184,17 +5184,17 @@
               <a:buNone/>
             </a:pPr>
             <a:r>
-              <a:rPr lang="en-US" sz="1400" dirty="0">
-                <a:solidFill>
-                  <a:srgbClr val="94A3B8"/>
-                </a:solidFill>
-                <a:latin typeface="Calibri" pitchFamily="34" charset="0"/>
-                <a:ea typeface="Calibri" pitchFamily="34" charset="-122"/>
-                <a:cs typeface="Calibri" pitchFamily="34" charset="-120"/>
+              <a:rPr lang="en-US" sz="1100" dirty="0">
+                <a:solidFill>
+                  <a:srgbClr val="8B95A5"/>
+                </a:solidFill>
+                <a:latin typeface="Verdana" pitchFamily="34" charset="0"/>
+                <a:ea typeface="Verdana" pitchFamily="34" charset="-122"/>
+                <a:cs typeface="Verdana" pitchFamily="34" charset="-120"/>
               </a:rPr>
               <a:t>→</a:t>
             </a:r>
-            <a:endParaRPr lang="en-US" sz="1400" dirty="0"/>
+            <a:endParaRPr lang="en-US" sz="1100" dirty="0"/>
           </a:p>
         </p:txBody>
       </p:sp>
@@ -5215,13 +5215,13 @@
             </a:avLst>
           </a:prstGeom>
           <a:solidFill>
-            <a:srgbClr val="0F0F1A">
+            <a:srgbClr val="0A2540">
               <a:alpha val="50000"/>
             </a:srgbClr>
           </a:solidFill>
           <a:ln w="12700">
             <a:solidFill>
-              <a:srgbClr val="94A3B8"/>
+              <a:srgbClr val="8B95A5"/>
             </a:solidFill>
             <a:prstDash val="solid"/>
           </a:ln>
@@ -5252,17 +5252,17 @@
               <a:buNone/>
             </a:pPr>
             <a:r>
-              <a:rPr lang="en-US" sz="1500" b="1" dirty="0">
-                <a:solidFill>
-                  <a:srgbClr val="94A3B8"/>
-                </a:solidFill>
-                <a:latin typeface="Calibri" pitchFamily="34" charset="0"/>
-                <a:ea typeface="Calibri" pitchFamily="34" charset="-122"/>
-                <a:cs typeface="Calibri" pitchFamily="34" charset="-120"/>
+              <a:rPr lang="en-US" sz="1200" b="1" dirty="0">
+                <a:solidFill>
+                  <a:srgbClr val="8B95A5"/>
+                </a:solidFill>
+                <a:latin typeface="Verdana" pitchFamily="34" charset="0"/>
+                <a:ea typeface="Verdana" pitchFamily="34" charset="-122"/>
+                <a:cs typeface="Verdana" pitchFamily="34" charset="-120"/>
               </a:rPr>
               <a:t>Whisperer</a:t>
             </a:r>
-            <a:endParaRPr lang="en-US" sz="1500" dirty="0"/>
+            <a:endParaRPr lang="en-US" sz="1200" dirty="0"/>
           </a:p>
         </p:txBody>
       </p:sp>
@@ -5291,17 +5291,17 @@
               <a:buNone/>
             </a:pPr>
             <a:r>
-              <a:rPr lang="en-US" sz="1400" dirty="0">
-                <a:solidFill>
-                  <a:srgbClr val="94A3B8"/>
-                </a:solidFill>
-                <a:latin typeface="Calibri" pitchFamily="34" charset="0"/>
-                <a:ea typeface="Calibri" pitchFamily="34" charset="-122"/>
-                <a:cs typeface="Calibri" pitchFamily="34" charset="-120"/>
+              <a:rPr lang="en-US" sz="1100" dirty="0">
+                <a:solidFill>
+                  <a:srgbClr val="8B95A5"/>
+                </a:solidFill>
+                <a:latin typeface="Verdana" pitchFamily="34" charset="0"/>
+                <a:ea typeface="Verdana" pitchFamily="34" charset="-122"/>
+                <a:cs typeface="Verdana" pitchFamily="34" charset="-120"/>
               </a:rPr>
               <a:t>→</a:t>
             </a:r>
-            <a:endParaRPr lang="en-US" sz="1400" dirty="0"/>
+            <a:endParaRPr lang="en-US" sz="1100" dirty="0"/>
           </a:p>
         </p:txBody>
       </p:sp>
@@ -5322,13 +5322,13 @@
             </a:avLst>
           </a:prstGeom>
           <a:solidFill>
-            <a:srgbClr val="0F0F1A">
+            <a:srgbClr val="0A2540">
               <a:alpha val="50000"/>
             </a:srgbClr>
           </a:solidFill>
           <a:ln w="12700">
             <a:solidFill>
-              <a:srgbClr val="94A3B8"/>
+              <a:srgbClr val="8B95A5"/>
             </a:solidFill>
             <a:prstDash val="solid"/>
           </a:ln>
@@ -5359,17 +5359,17 @@
               <a:buNone/>
             </a:pPr>
             <a:r>
-              <a:rPr lang="en-US" sz="1500" b="1" dirty="0">
-                <a:solidFill>
-                  <a:srgbClr val="94A3B8"/>
-                </a:solidFill>
-                <a:latin typeface="Calibri" pitchFamily="34" charset="0"/>
-                <a:ea typeface="Calibri" pitchFamily="34" charset="-122"/>
-                <a:cs typeface="Calibri" pitchFamily="34" charset="-120"/>
+              <a:rPr lang="en-US" sz="1200" b="1" dirty="0">
+                <a:solidFill>
+                  <a:srgbClr val="8B95A5"/>
+                </a:solidFill>
+                <a:latin typeface="Verdana" pitchFamily="34" charset="0"/>
+                <a:ea typeface="Verdana" pitchFamily="34" charset="-122"/>
+                <a:cs typeface="Verdana" pitchFamily="34" charset="-120"/>
               </a:rPr>
               <a:t>Strategist</a:t>
             </a:r>
-            <a:endParaRPr lang="en-US" sz="1500" dirty="0"/>
+            <a:endParaRPr lang="en-US" sz="1200" dirty="0"/>
           </a:p>
         </p:txBody>
       </p:sp>
@@ -5398,17 +5398,17 @@
               <a:buNone/>
             </a:pPr>
             <a:r>
-              <a:rPr lang="en-US" sz="1400" dirty="0">
-                <a:solidFill>
-                  <a:srgbClr val="94A3B8"/>
-                </a:solidFill>
-                <a:latin typeface="Calibri" pitchFamily="34" charset="0"/>
-                <a:ea typeface="Calibri" pitchFamily="34" charset="-122"/>
-                <a:cs typeface="Calibri" pitchFamily="34" charset="-120"/>
+              <a:rPr lang="en-US" sz="1100" dirty="0">
+                <a:solidFill>
+                  <a:srgbClr val="8B95A5"/>
+                </a:solidFill>
+                <a:latin typeface="Verdana" pitchFamily="34" charset="0"/>
+                <a:ea typeface="Verdana" pitchFamily="34" charset="-122"/>
+                <a:cs typeface="Verdana" pitchFamily="34" charset="-120"/>
               </a:rPr>
               <a:t>→</a:t>
             </a:r>
-            <a:endParaRPr lang="en-US" sz="1400" dirty="0"/>
+            <a:endParaRPr lang="en-US" sz="1100" dirty="0"/>
           </a:p>
         </p:txBody>
       </p:sp>
@@ -5429,13 +5429,13 @@
             </a:avLst>
           </a:prstGeom>
           <a:solidFill>
-            <a:srgbClr val="00B4D8">
+            <a:srgbClr val="635BFF">
               <a:alpha val="60000"/>
             </a:srgbClr>
           </a:solidFill>
           <a:ln w="25400">
             <a:solidFill>
-              <a:srgbClr val="00B4D8"/>
+              <a:srgbClr val="635BFF"/>
             </a:solidFill>
             <a:prstDash val="solid"/>
           </a:ln>
@@ -5466,17 +5466,17 @@
               <a:buNone/>
             </a:pPr>
             <a:r>
-              <a:rPr lang="en-US" sz="1500" b="1" dirty="0">
+              <a:rPr lang="en-US" sz="1200" b="1" dirty="0">
                 <a:solidFill>
                   <a:srgbClr val="FFFFFF"/>
                 </a:solidFill>
-                <a:latin typeface="Calibri" pitchFamily="34" charset="0"/>
-                <a:ea typeface="Calibri" pitchFamily="34" charset="-122"/>
-                <a:cs typeface="Calibri" pitchFamily="34" charset="-120"/>
+                <a:latin typeface="Verdana" pitchFamily="34" charset="0"/>
+                <a:ea typeface="Verdana" pitchFamily="34" charset="-122"/>
+                <a:cs typeface="Verdana" pitchFamily="34" charset="-120"/>
               </a:rPr>
               <a:t>Operator</a:t>
             </a:r>
-            <a:endParaRPr lang="en-US" sz="1500" dirty="0"/>
+            <a:endParaRPr lang="en-US" sz="1200" dirty="0"/>
           </a:p>
         </p:txBody>
       </p:sp>
@@ -5505,17 +5505,17 @@
               <a:buNone/>
             </a:pPr>
             <a:r>
-              <a:rPr lang="en-US" sz="1400" dirty="0">
-                <a:solidFill>
-                  <a:srgbClr val="94A3B8"/>
-                </a:solidFill>
-                <a:latin typeface="Calibri" pitchFamily="34" charset="0"/>
-                <a:ea typeface="Calibri" pitchFamily="34" charset="-122"/>
-                <a:cs typeface="Calibri" pitchFamily="34" charset="-120"/>
+              <a:rPr lang="en-US" sz="1100" dirty="0">
+                <a:solidFill>
+                  <a:srgbClr val="8B95A5"/>
+                </a:solidFill>
+                <a:latin typeface="Verdana" pitchFamily="34" charset="0"/>
+                <a:ea typeface="Verdana" pitchFamily="34" charset="-122"/>
+                <a:cs typeface="Verdana" pitchFamily="34" charset="-120"/>
               </a:rPr>
               <a:t>→</a:t>
             </a:r>
-            <a:endParaRPr lang="en-US" sz="1400" dirty="0"/>
+            <a:endParaRPr lang="en-US" sz="1100" dirty="0"/>
           </a:p>
         </p:txBody>
       </p:sp>
@@ -5536,11 +5536,11 @@
             </a:avLst>
           </a:prstGeom>
           <a:solidFill>
-            <a:srgbClr val="00B4D8"/>
+            <a:srgbClr val="635BFF"/>
           </a:solidFill>
           <a:ln w="25400">
             <a:solidFill>
-              <a:srgbClr val="00B4D8"/>
+              <a:srgbClr val="635BFF"/>
             </a:solidFill>
             <a:prstDash val="solid"/>
           </a:ln>
@@ -5571,17 +5571,17 @@
               <a:buNone/>
             </a:pPr>
             <a:r>
-              <a:rPr lang="en-US" sz="1500" b="1" dirty="0">
+              <a:rPr lang="en-US" sz="1200" b="1" dirty="0">
                 <a:solidFill>
                   <a:srgbClr val="FFFFFF"/>
                 </a:solidFill>
-                <a:latin typeface="Calibri" pitchFamily="34" charset="0"/>
-                <a:ea typeface="Calibri" pitchFamily="34" charset="-122"/>
-                <a:cs typeface="Calibri" pitchFamily="34" charset="-120"/>
+                <a:latin typeface="Verdana" pitchFamily="34" charset="0"/>
+                <a:ea typeface="Verdana" pitchFamily="34" charset="-122"/>
+                <a:cs typeface="Verdana" pitchFamily="34" charset="-120"/>
               </a:rPr>
               <a:t>Orchestrator</a:t>
             </a:r>
-            <a:endParaRPr lang="en-US" sz="1500" dirty="0"/>
+            <a:endParaRPr lang="en-US" sz="1200" dirty="0"/>
           </a:p>
         </p:txBody>
       </p:sp>
@@ -5610,17 +5610,17 @@
               <a:buNone/>
             </a:pPr>
             <a:r>
-              <a:rPr lang="en-US" sz="1400" dirty="0">
-                <a:solidFill>
-                  <a:srgbClr val="94A3B8"/>
-                </a:solidFill>
-                <a:latin typeface="Calibri" pitchFamily="34" charset="0"/>
-                <a:ea typeface="Calibri" pitchFamily="34" charset="-122"/>
-                <a:cs typeface="Calibri" pitchFamily="34" charset="-120"/>
+              <a:rPr lang="en-US" sz="1100" dirty="0">
+                <a:solidFill>
+                  <a:srgbClr val="8B95A5"/>
+                </a:solidFill>
+                <a:latin typeface="Verdana" pitchFamily="34" charset="0"/>
+                <a:ea typeface="Verdana" pitchFamily="34" charset="-122"/>
+                <a:cs typeface="Verdana" pitchFamily="34" charset="-120"/>
               </a:rPr>
               <a:t>→</a:t>
             </a:r>
-            <a:endParaRPr lang="en-US" sz="1400" dirty="0"/>
+            <a:endParaRPr lang="en-US" sz="1100" dirty="0"/>
           </a:p>
         </p:txBody>
       </p:sp>
@@ -5641,13 +5641,13 @@
             </a:avLst>
           </a:prstGeom>
           <a:solidFill>
-            <a:srgbClr val="0F0F1A">
+            <a:srgbClr val="0A2540">
               <a:alpha val="50000"/>
             </a:srgbClr>
           </a:solidFill>
           <a:ln w="12700">
             <a:solidFill>
-              <a:srgbClr val="94A3B8"/>
+              <a:srgbClr val="8B95A5"/>
             </a:solidFill>
             <a:prstDash val="dash"/>
           </a:ln>
@@ -5678,17 +5678,17 @@
               <a:buNone/>
             </a:pPr>
             <a:r>
-              <a:rPr lang="en-US" sz="1500" b="1" dirty="0">
-                <a:solidFill>
-                  <a:srgbClr val="94A3B8"/>
-                </a:solidFill>
-                <a:latin typeface="Calibri" pitchFamily="34" charset="0"/>
-                <a:ea typeface="Calibri" pitchFamily="34" charset="-122"/>
-                <a:cs typeface="Calibri" pitchFamily="34" charset="-120"/>
+              <a:rPr lang="en-US" sz="1200" b="1" dirty="0">
+                <a:solidFill>
+                  <a:srgbClr val="8B95A5"/>
+                </a:solidFill>
+                <a:latin typeface="Verdana" pitchFamily="34" charset="0"/>
+                <a:ea typeface="Verdana" pitchFamily="34" charset="-122"/>
+                <a:cs typeface="Verdana" pitchFamily="34" charset="-120"/>
               </a:rPr>
               <a:t>Builder</a:t>
             </a:r>
-            <a:endParaRPr lang="en-US" sz="1500" dirty="0"/>
+            <a:endParaRPr lang="en-US" sz="1200" dirty="0"/>
           </a:p>
         </p:txBody>
       </p:sp>
@@ -5719,7 +5719,7 @@
             <a:r>
               <a:rPr lang="en-US" sz="3200" b="1" dirty="0">
                 <a:solidFill>
-                  <a:srgbClr val="00B4D8"/>
+                  <a:srgbClr val="635BFF"/>
                 </a:solidFill>
                 <a:latin typeface="Georgia" pitchFamily="34" charset="0"/>
                 <a:ea typeface="Georgia" pitchFamily="34" charset="-122"/>
@@ -5745,7 +5745,7 @@
     <p:bg>
       <p:bgPr>
         <a:solidFill>
-          <a:srgbClr val="0F0F1A"/>
+          <a:srgbClr val="0A2540"/>
         </a:solidFill>
       </p:bgPr>
     </p:bg>
@@ -5778,7 +5778,7 @@
             <a:avLst/>
           </a:prstGeom>
           <a:solidFill>
-            <a:srgbClr val="00B4D8">
+            <a:srgbClr val="635BFF">
               <a:alpha val="4000"/>
             </a:srgbClr>
           </a:solidFill>
@@ -5868,11 +5868,11 @@
             <a:r>
               <a:rPr lang="en-US" sz="2800" dirty="0">
                 <a:solidFill>
-                  <a:srgbClr val="94A3B8"/>
-                </a:solidFill>
-                <a:latin typeface="Calibri" pitchFamily="34" charset="0"/>
-                <a:ea typeface="Calibri" pitchFamily="34" charset="-122"/>
-                <a:cs typeface="Calibri" pitchFamily="34" charset="-120"/>
+                  <a:srgbClr val="8B95A5"/>
+                </a:solidFill>
+                <a:latin typeface="Verdana" pitchFamily="34" charset="0"/>
+                <a:ea typeface="Verdana" pitchFamily="34" charset="-122"/>
+                <a:cs typeface="Verdana" pitchFamily="34" charset="-120"/>
               </a:rPr>
               <a:t>Now go try it — one task, this week.</a:t>
             </a:r>
@@ -5894,7 +5894,7 @@
     <p:bg>
       <p:bgPr>
         <a:solidFill>
-          <a:srgbClr val="0F0F1A"/>
+          <a:srgbClr val="0A2540"/>
         </a:solidFill>
       </p:bgPr>
     </p:bg>
@@ -5927,7 +5927,7 @@
             <a:avLst/>
           </a:prstGeom>
           <a:solidFill>
-            <a:srgbClr val="00B4D8">
+            <a:srgbClr val="635BFF">
               <a:alpha val="4000"/>
             </a:srgbClr>
           </a:solidFill>
@@ -6021,7 +6021,7 @@
     <p:bg>
       <p:bgPr>
         <a:solidFill>
-          <a:srgbClr val="0F0F1A"/>
+          <a:srgbClr val="0A2540"/>
         </a:solidFill>
       </p:bgPr>
     </p:bg>
@@ -6054,7 +6054,7 @@
             <a:avLst/>
           </a:prstGeom>
           <a:solidFill>
-            <a:srgbClr val="00B4D8">
+            <a:srgbClr val="635BFF">
               <a:alpha val="4000"/>
             </a:srgbClr>
           </a:solidFill>
@@ -6144,11 +6144,11 @@
             <a:r>
               <a:rPr lang="en-US" sz="2800" dirty="0">
                 <a:solidFill>
-                  <a:srgbClr val="94A3B8"/>
-                </a:solidFill>
-                <a:latin typeface="Calibri" pitchFamily="34" charset="0"/>
-                <a:ea typeface="Calibri" pitchFamily="34" charset="-122"/>
-                <a:cs typeface="Calibri" pitchFamily="34" charset="-120"/>
+                  <a:srgbClr val="8B95A5"/>
+                </a:solidFill>
+                <a:latin typeface="Verdana" pitchFamily="34" charset="0"/>
+                <a:ea typeface="Verdana" pitchFamily="34" charset="-122"/>
+                <a:cs typeface="Verdana" pitchFamily="34" charset="-120"/>
               </a:rPr>
               <a:t>Burnout. Mistakes. Forgotten appetizer.</a:t>
             </a:r>
@@ -6170,7 +6170,7 @@
     <p:bg>
       <p:bgPr>
         <a:solidFill>
-          <a:srgbClr val="0F0F1A"/>
+          <a:srgbClr val="0A2540"/>
         </a:solidFill>
       </p:bgPr>
     </p:bg>
@@ -6203,7 +6203,7 @@
             <a:avLst/>
           </a:prstGeom>
           <a:solidFill>
-            <a:srgbClr val="00B4D8">
+            <a:srgbClr val="635BFF">
               <a:alpha val="4000"/>
             </a:srgbClr>
           </a:solidFill>
@@ -6314,7 +6314,7 @@
     <p:bg>
       <p:bgPr>
         <a:solidFill>
-          <a:srgbClr val="0F0F1A"/>
+          <a:srgbClr val="0A2540"/>
         </a:solidFill>
       </p:bgPr>
     </p:bg>
@@ -6347,7 +6347,7 @@
             <a:avLst/>
           </a:prstGeom>
           <a:solidFill>
-            <a:srgbClr val="00B4D8">
+            <a:srgbClr val="635BFF">
               <a:alpha val="4000"/>
             </a:srgbClr>
           </a:solidFill>
@@ -6381,11 +6381,11 @@
             <a:r>
               <a:rPr lang="en-US" sz="2200" b="1" dirty="0">
                 <a:solidFill>
-                  <a:srgbClr val="00B4D8"/>
-                </a:solidFill>
-                <a:latin typeface="Calibri" pitchFamily="34" charset="0"/>
-                <a:ea typeface="Calibri" pitchFamily="34" charset="-122"/>
-                <a:cs typeface="Calibri" pitchFamily="34" charset="-120"/>
+                  <a:srgbClr val="635BFF"/>
+                </a:solidFill>
+                <a:latin typeface="Verdana" pitchFamily="34" charset="0"/>
+                <a:ea typeface="Verdana" pitchFamily="34" charset="-122"/>
+                <a:cs typeface="Verdana" pitchFamily="34" charset="-120"/>
               </a:rPr>
               <a:t>YOUR TURN</a:t>
             </a:r>
@@ -6476,11 +6476,11 @@
             <a:r>
               <a:rPr lang="en-US" sz="2200" dirty="0">
                 <a:solidFill>
-                  <a:srgbClr val="94A3B8"/>
-                </a:solidFill>
-                <a:latin typeface="Calibri" pitchFamily="34" charset="0"/>
-                <a:ea typeface="Calibri" pitchFamily="34" charset="-122"/>
-                <a:cs typeface="Calibri" pitchFamily="34" charset="-120"/>
+                  <a:srgbClr val="8B95A5"/>
+                </a:solidFill>
+                <a:latin typeface="Verdana" pitchFamily="34" charset="0"/>
+                <a:ea typeface="Verdana" pitchFamily="34" charset="-122"/>
+                <a:cs typeface="Verdana" pitchFamily="34" charset="-120"/>
               </a:rPr>
               <a:t>What are the steps? What does each</a:t>
             </a:r>
@@ -6493,11 +6493,11 @@
             <a:r>
               <a:rPr lang="en-US" sz="2200" dirty="0">
                 <a:solidFill>
-                  <a:srgbClr val="94A3B8"/>
-                </a:solidFill>
-                <a:latin typeface="Calibri" pitchFamily="34" charset="0"/>
-                <a:ea typeface="Calibri" pitchFamily="34" charset="-122"/>
-                <a:cs typeface="Calibri" pitchFamily="34" charset="-120"/>
+                  <a:srgbClr val="8B95A5"/>
+                </a:solidFill>
+                <a:latin typeface="Verdana" pitchFamily="34" charset="0"/>
+                <a:ea typeface="Verdana" pitchFamily="34" charset="-122"/>
+                <a:cs typeface="Verdana" pitchFamily="34" charset="-120"/>
               </a:rPr>
               <a:t>step produce? What does the next</a:t>
             </a:r>
@@ -6510,11 +6510,11 @@
             <a:r>
               <a:rPr lang="en-US" sz="2200" dirty="0">
                 <a:solidFill>
-                  <a:srgbClr val="94A3B8"/>
-                </a:solidFill>
-                <a:latin typeface="Calibri" pitchFamily="34" charset="0"/>
-                <a:ea typeface="Calibri" pitchFamily="34" charset="-122"/>
-                <a:cs typeface="Calibri" pitchFamily="34" charset="-120"/>
+                  <a:srgbClr val="8B95A5"/>
+                </a:solidFill>
+                <a:latin typeface="Verdana" pitchFamily="34" charset="0"/>
+                <a:ea typeface="Verdana" pitchFamily="34" charset="-122"/>
+                <a:cs typeface="Verdana" pitchFamily="34" charset="-120"/>
               </a:rPr>
               <a:t>step need from the previous one?</a:t>
             </a:r>
@@ -6536,7 +6536,7 @@
     <p:bg>
       <p:bgPr>
         <a:solidFill>
-          <a:srgbClr val="0F0F1A"/>
+          <a:srgbClr val="0A2540"/>
         </a:solidFill>
       </p:bgPr>
     </p:bg>
@@ -6569,7 +6569,7 @@
             <a:avLst/>
           </a:prstGeom>
           <a:solidFill>
-            <a:srgbClr val="00B4D8">
+            <a:srgbClr val="635BFF">
               <a:alpha val="4000"/>
             </a:srgbClr>
           </a:solidFill>
@@ -6646,7 +6646,7 @@
     <p:bg>
       <p:bgPr>
         <a:solidFill>
-          <a:srgbClr val="0F0F1A"/>
+          <a:srgbClr val="0A2540"/>
         </a:solidFill>
       </p:bgPr>
     </p:bg>
@@ -6679,7 +6679,7 @@
             <a:avLst/>
           </a:prstGeom>
           <a:solidFill>
-            <a:srgbClr val="00B4D8">
+            <a:srgbClr val="635BFF">
               <a:alpha val="4000"/>
             </a:srgbClr>
           </a:solidFill>
@@ -6703,7 +6703,7 @@
             </a:avLst>
           </a:prstGeom>
           <a:solidFill>
-            <a:srgbClr val="00B4D8"/>
+            <a:srgbClr val="635BFF"/>
           </a:solidFill>
           <a:ln/>
         </p:spPr>
@@ -6737,9 +6737,9 @@
                 <a:solidFill>
                   <a:srgbClr val="FFFFFF"/>
                 </a:solidFill>
-                <a:latin typeface="Calibri" pitchFamily="34" charset="0"/>
-                <a:ea typeface="Calibri" pitchFamily="34" charset="-122"/>
-                <a:cs typeface="Calibri" pitchFamily="34" charset="-120"/>
+                <a:latin typeface="Verdana" pitchFamily="34" charset="0"/>
+                <a:ea typeface="Verdana" pitchFamily="34" charset="-122"/>
+                <a:cs typeface="Verdana" pitchFamily="34" charset="-120"/>
               </a:rPr>
               <a:t>Research</a:t>
             </a:r>
@@ -6774,11 +6774,11 @@
             <a:r>
               <a:rPr lang="en-US" sz="2800" b="1" dirty="0">
                 <a:solidFill>
-                  <a:srgbClr val="00B4D8"/>
-                </a:solidFill>
-                <a:latin typeface="Calibri" pitchFamily="34" charset="0"/>
-                <a:ea typeface="Calibri" pitchFamily="34" charset="-122"/>
-                <a:cs typeface="Calibri" pitchFamily="34" charset="-120"/>
+                  <a:srgbClr val="635BFF"/>
+                </a:solidFill>
+                <a:latin typeface="Verdana" pitchFamily="34" charset="0"/>
+                <a:ea typeface="Verdana" pitchFamily="34" charset="-122"/>
+                <a:cs typeface="Verdana" pitchFamily="34" charset="-120"/>
               </a:rPr>
               <a:t>→</a:t>
             </a:r>
@@ -6803,7 +6803,7 @@
             </a:avLst>
           </a:prstGeom>
           <a:solidFill>
-            <a:srgbClr val="00B4D8"/>
+            <a:srgbClr val="635BFF"/>
           </a:solidFill>
           <a:ln/>
         </p:spPr>
@@ -6837,9 +6837,9 @@
                 <a:solidFill>
                   <a:srgbClr val="FFFFFF"/>
                 </a:solidFill>
-                <a:latin typeface="Calibri" pitchFamily="34" charset="0"/>
-                <a:ea typeface="Calibri" pitchFamily="34" charset="-122"/>
-                <a:cs typeface="Calibri" pitchFamily="34" charset="-120"/>
+                <a:latin typeface="Verdana" pitchFamily="34" charset="0"/>
+                <a:ea typeface="Verdana" pitchFamily="34" charset="-122"/>
+                <a:cs typeface="Verdana" pitchFamily="34" charset="-120"/>
               </a:rPr>
               <a:t>Draft</a:t>
             </a:r>
@@ -6874,11 +6874,11 @@
             <a:r>
               <a:rPr lang="en-US" sz="2800" b="1" dirty="0">
                 <a:solidFill>
-                  <a:srgbClr val="00B4D8"/>
-                </a:solidFill>
-                <a:latin typeface="Calibri" pitchFamily="34" charset="0"/>
-                <a:ea typeface="Calibri" pitchFamily="34" charset="-122"/>
-                <a:cs typeface="Calibri" pitchFamily="34" charset="-120"/>
+                  <a:srgbClr val="635BFF"/>
+                </a:solidFill>
+                <a:latin typeface="Verdana" pitchFamily="34" charset="0"/>
+                <a:ea typeface="Verdana" pitchFamily="34" charset="-122"/>
+                <a:cs typeface="Verdana" pitchFamily="34" charset="-120"/>
               </a:rPr>
               <a:t>→</a:t>
             </a:r>
@@ -6903,7 +6903,7 @@
             </a:avLst>
           </a:prstGeom>
           <a:solidFill>
-            <a:srgbClr val="00B4D8"/>
+            <a:srgbClr val="635BFF"/>
           </a:solidFill>
           <a:ln/>
         </p:spPr>
@@ -6937,9 +6937,9 @@
                 <a:solidFill>
                   <a:srgbClr val="FFFFFF"/>
                 </a:solidFill>
-                <a:latin typeface="Calibri" pitchFamily="34" charset="0"/>
-                <a:ea typeface="Calibri" pitchFamily="34" charset="-122"/>
-                <a:cs typeface="Calibri" pitchFamily="34" charset="-120"/>
+                <a:latin typeface="Verdana" pitchFamily="34" charset="0"/>
+                <a:ea typeface="Verdana" pitchFamily="34" charset="-122"/>
+                <a:cs typeface="Verdana" pitchFamily="34" charset="-120"/>
               </a:rPr>
               <a:t>Review</a:t>
             </a:r>
@@ -6974,11 +6974,11 @@
             <a:r>
               <a:rPr lang="en-US" sz="2800" b="1" dirty="0">
                 <a:solidFill>
-                  <a:srgbClr val="00B4D8"/>
-                </a:solidFill>
-                <a:latin typeface="Calibri" pitchFamily="34" charset="0"/>
-                <a:ea typeface="Calibri" pitchFamily="34" charset="-122"/>
-                <a:cs typeface="Calibri" pitchFamily="34" charset="-120"/>
+                  <a:srgbClr val="635BFF"/>
+                </a:solidFill>
+                <a:latin typeface="Verdana" pitchFamily="34" charset="0"/>
+                <a:ea typeface="Verdana" pitchFamily="34" charset="-122"/>
+                <a:cs typeface="Verdana" pitchFamily="34" charset="-120"/>
               </a:rPr>
               <a:t>→</a:t>
             </a:r>
@@ -7003,7 +7003,7 @@
             </a:avLst>
           </a:prstGeom>
           <a:solidFill>
-            <a:srgbClr val="2D936C"/>
+            <a:srgbClr val="09825D"/>
           </a:solidFill>
           <a:ln/>
         </p:spPr>
@@ -7037,9 +7037,9 @@
                 <a:solidFill>
                   <a:srgbClr val="FFFFFF"/>
                 </a:solidFill>
-                <a:latin typeface="Calibri" pitchFamily="34" charset="0"/>
-                <a:ea typeface="Calibri" pitchFamily="34" charset="-122"/>
-                <a:cs typeface="Calibri" pitchFamily="34" charset="-120"/>
+                <a:latin typeface="Verdana" pitchFamily="34" charset="0"/>
+                <a:ea typeface="Verdana" pitchFamily="34" charset="-122"/>
+                <a:cs typeface="Verdana" pitchFamily="34" charset="-120"/>
               </a:rPr>
               <a:t>You</a:t>
             </a:r>
@@ -7061,7 +7061,7 @@
     <p:bg>
       <p:bgPr>
         <a:solidFill>
-          <a:srgbClr val="0F0F1A"/>
+          <a:srgbClr val="0A2540"/>
         </a:solidFill>
       </p:bgPr>
     </p:bg>
@@ -7094,7 +7094,7 @@
             <a:avLst/>
           </a:prstGeom>
           <a:solidFill>
-            <a:srgbClr val="00B4D8">
+            <a:srgbClr val="635BFF">
               <a:alpha val="4000"/>
             </a:srgbClr>
           </a:solidFill>
